--- a/template_esempio_compilato.pptx
+++ b/template_esempio_compilato.pptx
@@ -3188,7 +3188,7 @@
         <p:spPr>
           <a:xfrm>
             <a:off x="502920" y="475488"/>
-            <a:ext cx="10058400" cy="731520"/>
+            <a:ext cx="11201400" cy="731520"/>
           </a:xfrm>
           <a:prstGeom prst="rect">
             <a:avLst/>
@@ -3209,7 +3209,7 @@
                 </a:solidFill>
                 <a:latin typeface="Calibri"/>
               </a:rPr>
-              <a:t>PANORAMICA</a:t>
+              <a:t>LIVELLO GENERALE MATURITÀ</a:t>
             </a:r>
           </a:p>
         </p:txBody>
@@ -3222,29 +3222,29 @@
         </p:nvSpPr>
         <p:spPr>
           <a:xfrm>
-            <a:off x="502920" y="1078992"/>
-            <a:ext cx="10515600" cy="365760"/>
-          </a:xfrm>
-          <a:prstGeom prst="rect">
-            <a:avLst/>
-          </a:prstGeom>
-          <a:noFill/>
-        </p:spPr>
-        <p:txBody>
-          <a:bodyPr wrap="square" anchor="t" lIns="0" rIns="0" tIns="0" bIns="0">
-            <a:spAutoFit/>
-          </a:bodyPr>
-          <a:lstStyle/>
-          <a:p>
-            <a:pPr algn="l"/>
-            <a:r>
-              <a:rPr sz="1300" b="0">
+            <a:off x="502920" y="1600200"/>
+            <a:ext cx="4937760" cy="365760"/>
+          </a:xfrm>
+          <a:prstGeom prst="rect">
+            <a:avLst/>
+          </a:prstGeom>
+          <a:noFill/>
+        </p:spPr>
+        <p:txBody>
+          <a:bodyPr wrap="square" anchor="t" lIns="0" rIns="0" tIns="0" bIns="0">
+            <a:spAutoFit/>
+          </a:bodyPr>
+          <a:lstStyle/>
+          <a:p>
+            <a:pPr algn="l"/>
+            <a:r>
+              <a:rPr sz="1400" b="1">
                 <a:solidFill>
                   <a:srgbClr val="555555"/>
                 </a:solidFill>
                 <a:latin typeface="Calibri"/>
               </a:rPr>
-              <a:t>Livello di maturità DEIA aggregato sull'intero assessment</a:t>
+              <a:t>AREA</a:t>
             </a:r>
           </a:p>
         </p:txBody>
@@ -3257,112 +3257,42 @@
         </p:nvSpPr>
         <p:spPr>
           <a:xfrm>
-            <a:off x="502920" y="2148840"/>
-            <a:ext cx="5486400" cy="320040"/>
-          </a:xfrm>
-          <a:prstGeom prst="rect">
-            <a:avLst/>
-          </a:prstGeom>
-          <a:noFill/>
-        </p:spPr>
-        <p:txBody>
-          <a:bodyPr wrap="square" anchor="t" lIns="0" rIns="0" tIns="0" bIns="0">
-            <a:spAutoFit/>
-          </a:bodyPr>
-          <a:lstStyle/>
-          <a:p>
-            <a:pPr algn="l"/>
-            <a:r>
-              <a:rPr sz="1300" b="1">
-                <a:solidFill>
-                  <a:srgbClr val="1A1A1A"/>
-                </a:solidFill>
-                <a:latin typeface="Calibri"/>
-              </a:rPr>
-              <a:t>LIVELLO MACRO</a:t>
-            </a:r>
-          </a:p>
-        </p:txBody>
-      </p:sp>
-      <p:sp>
-        <p:nvSpPr>
-          <p:cNvPr id="6" name="TextBox 5"/>
-          <p:cNvSpPr txBox="1"/>
-          <p:nvPr/>
-        </p:nvSpPr>
-        <p:spPr>
-          <a:xfrm>
-            <a:off x="502920" y="2542032"/>
-            <a:ext cx="8686800" cy="1371600"/>
-          </a:xfrm>
-          <a:prstGeom prst="rect">
-            <a:avLst/>
-          </a:prstGeom>
-          <a:noFill/>
-        </p:spPr>
-        <p:txBody>
-          <a:bodyPr wrap="square" anchor="t" lIns="0" rIns="0" tIns="0" bIns="0">
-            <a:spAutoFit/>
-          </a:bodyPr>
-          <a:lstStyle/>
-          <a:p>
-            <a:pPr algn="l"/>
-            <a:r>
-              <a:rPr sz="4600" b="1">
-                <a:solidFill>
-                  <a:srgbClr val="1A1A1A"/>
-                </a:solidFill>
-                <a:latin typeface="Calibri"/>
-              </a:rPr>
-              <a:t>4 - GRAVITA'</a:t>
-            </a:r>
-          </a:p>
-        </p:txBody>
-      </p:sp>
-      <p:sp>
-        <p:nvSpPr>
-          <p:cNvPr id="7" name="TextBox 6"/>
-          <p:cNvSpPr txBox="1"/>
-          <p:nvPr/>
-        </p:nvSpPr>
-        <p:spPr>
-          <a:xfrm>
-            <a:off x="502920" y="3977639"/>
-            <a:ext cx="5486400" cy="457200"/>
-          </a:xfrm>
-          <a:prstGeom prst="rect">
-            <a:avLst/>
-          </a:prstGeom>
-          <a:noFill/>
-        </p:spPr>
-        <p:txBody>
-          <a:bodyPr wrap="square" anchor="t" lIns="0" rIns="0" tIns="0" bIns="0">
-            <a:spAutoFit/>
-          </a:bodyPr>
-          <a:lstStyle/>
-          <a:p>
-            <a:pPr algn="l"/>
-            <a:r>
-              <a:rPr sz="1800" b="0">
+            <a:off x="5486400" y="1600200"/>
+            <a:ext cx="5486400" cy="365760"/>
+          </a:xfrm>
+          <a:prstGeom prst="rect">
+            <a:avLst/>
+          </a:prstGeom>
+          <a:noFill/>
+        </p:spPr>
+        <p:txBody>
+          <a:bodyPr wrap="square" anchor="t" lIns="0" rIns="0" tIns="0" bIns="0">
+            <a:spAutoFit/>
+          </a:bodyPr>
+          <a:lstStyle/>
+          <a:p>
+            <a:pPr algn="l"/>
+            <a:r>
+              <a:rPr sz="1400" b="1">
                 <a:solidFill>
                   <a:srgbClr val="555555"/>
                 </a:solidFill>
                 <a:latin typeface="Calibri"/>
               </a:rPr>
-              <a:t>4,00 / 4</a:t>
-            </a:r>
-          </a:p>
-        </p:txBody>
-      </p:sp>
-      <p:sp>
-        <p:nvSpPr>
-          <p:cNvPr id="8" name="Rectangle 7"/>
+              <a:t>RISULTATO</a:t>
+            </a:r>
+          </a:p>
+        </p:txBody>
+      </p:sp>
+      <p:sp>
+        <p:nvSpPr>
+          <p:cNvPr id="6" name="Rectangle 5"/>
           <p:cNvSpPr/>
           <p:nvPr/>
         </p:nvSpPr>
         <p:spPr>
           <a:xfrm>
-            <a:off x="502920" y="4709160"/>
+            <a:off x="502920" y="2011680"/>
             <a:ext cx="11201400" cy="9525"/>
           </a:xfrm>
           <a:prstGeom prst="rect">
@@ -3399,36 +3329,114 @@
       </p:sp>
       <p:sp>
         <p:nvSpPr>
-          <p:cNvPr id="9" name="TextBox 8"/>
-          <p:cNvSpPr txBox="1"/>
-          <p:nvPr/>
-        </p:nvSpPr>
-        <p:spPr>
-          <a:xfrm>
-            <a:off x="502920" y="4892040"/>
-            <a:ext cx="11201400" cy="320040"/>
-          </a:xfrm>
-          <a:prstGeom prst="rect">
-            <a:avLst/>
-          </a:prstGeom>
-          <a:noFill/>
-        </p:spPr>
-        <p:txBody>
-          <a:bodyPr wrap="square" anchor="t" lIns="0" rIns="0" tIns="0" bIns="0">
-            <a:spAutoFit/>
-          </a:bodyPr>
-          <a:lstStyle/>
-          <a:p>
-            <a:pPr algn="l"/>
-            <a:r>
-              <a:rPr sz="1300" b="1">
+          <p:cNvPr id="7" name="TextBox 6"/>
+          <p:cNvSpPr txBox="1"/>
+          <p:nvPr/>
+        </p:nvSpPr>
+        <p:spPr>
+          <a:xfrm>
+            <a:off x="502920" y="2240280"/>
+            <a:ext cx="4937760" cy="822960"/>
+          </a:xfrm>
+          <a:prstGeom prst="rect">
+            <a:avLst/>
+          </a:prstGeom>
+          <a:noFill/>
+        </p:spPr>
+        <p:txBody>
+          <a:bodyPr wrap="square" anchor="t" lIns="0" rIns="0" tIns="0" bIns="0">
+            <a:spAutoFit/>
+          </a:bodyPr>
+          <a:lstStyle/>
+          <a:p>
+            <a:pPr algn="l"/>
+            <a:r>
+              <a:rPr sz="2000" b="1">
                 <a:solidFill>
                   <a:srgbClr val="1A1A1A"/>
                 </a:solidFill>
                 <a:latin typeface="Calibri"/>
               </a:rPr>
-              <a:t>COSA SIGNIFICA</a:t>
-            </a:r>
+              <a:t>STRATEGIA</a:t>
+            </a:r>
+          </a:p>
+        </p:txBody>
+      </p:sp>
+      <p:sp>
+        <p:nvSpPr>
+          <p:cNvPr id="8" name="TextBox 7"/>
+          <p:cNvSpPr txBox="1"/>
+          <p:nvPr/>
+        </p:nvSpPr>
+        <p:spPr>
+          <a:xfrm>
+            <a:off x="5486400" y="2240280"/>
+            <a:ext cx="5486400" cy="822960"/>
+          </a:xfrm>
+          <a:prstGeom prst="rect">
+            <a:avLst/>
+          </a:prstGeom>
+          <a:noFill/>
+        </p:spPr>
+        <p:txBody>
+          <a:bodyPr wrap="square" anchor="t" lIns="0" rIns="0" tIns="0" bIns="0">
+            <a:spAutoFit/>
+          </a:bodyPr>
+          <a:lstStyle/>
+          <a:p>
+            <a:pPr algn="l"/>
+            <a:r>
+              <a:rPr sz="2000" b="0">
+                <a:solidFill>
+                  <a:srgbClr val="555555"/>
+                </a:solidFill>
+                <a:latin typeface="Calibri"/>
+              </a:rPr>
+              <a:t>2 - ROTTA</a:t>
+            </a:r>
+          </a:p>
+        </p:txBody>
+      </p:sp>
+      <p:sp>
+        <p:nvSpPr>
+          <p:cNvPr id="9" name="Rectangle 8"/>
+          <p:cNvSpPr/>
+          <p:nvPr/>
+        </p:nvSpPr>
+        <p:spPr>
+          <a:xfrm>
+            <a:off x="502920" y="3017520"/>
+            <a:ext cx="11201400" cy="9525"/>
+          </a:xfrm>
+          <a:prstGeom prst="rect">
+            <a:avLst/>
+          </a:prstGeom>
+          <a:solidFill>
+            <a:srgbClr val="CCCCCC"/>
+          </a:solidFill>
+          <a:ln>
+            <a:noFill/>
+          </a:ln>
+        </p:spPr>
+        <p:style>
+          <a:lnRef idx="1">
+            <a:schemeClr val="accent1"/>
+          </a:lnRef>
+          <a:fillRef idx="3">
+            <a:schemeClr val="accent1"/>
+          </a:fillRef>
+          <a:effectRef idx="2">
+            <a:schemeClr val="accent1"/>
+          </a:effectRef>
+          <a:fontRef idx="minor">
+            <a:schemeClr val="lt1"/>
+          </a:fontRef>
+        </p:style>
+        <p:txBody>
+          <a:bodyPr rtlCol="0" anchor="ctr"/>
+          <a:lstStyle/>
+          <a:p>
+            <a:pPr algn="ctr"/>
           </a:p>
         </p:txBody>
       </p:sp>
@@ -3440,30 +3448,334 @@
         </p:nvSpPr>
         <p:spPr>
           <a:xfrm>
-            <a:off x="502920" y="5257800"/>
-            <a:ext cx="11201400" cy="1371600"/>
-          </a:xfrm>
-          <a:prstGeom prst="rect">
-            <a:avLst/>
-          </a:prstGeom>
-          <a:noFill/>
-        </p:spPr>
-        <p:txBody>
-          <a:bodyPr wrap="square" anchor="t" lIns="0" rIns="0" tIns="0" bIns="0">
-            <a:spAutoFit/>
-          </a:bodyPr>
-          <a:lstStyle/>
-          <a:p>
-            <a:pPr algn="l"/>
-            <a:r>
-              <a:rPr sz="1200" b="0">
+            <a:off x="502920" y="3063240"/>
+            <a:ext cx="4937760" cy="822960"/>
+          </a:xfrm>
+          <a:prstGeom prst="rect">
+            <a:avLst/>
+          </a:prstGeom>
+          <a:noFill/>
+        </p:spPr>
+        <p:txBody>
+          <a:bodyPr wrap="square" anchor="t" lIns="0" rIns="0" tIns="0" bIns="0">
+            <a:spAutoFit/>
+          </a:bodyPr>
+          <a:lstStyle/>
+          <a:p>
+            <a:pPr algn="l"/>
+            <a:r>
+              <a:rPr sz="2000" b="1">
+                <a:solidFill>
+                  <a:srgbClr val="1A1A1A"/>
+                </a:solidFill>
+                <a:latin typeface="Calibri"/>
+              </a:rPr>
+              <a:t>CULTURA</a:t>
+            </a:r>
+          </a:p>
+        </p:txBody>
+      </p:sp>
+      <p:sp>
+        <p:nvSpPr>
+          <p:cNvPr id="11" name="TextBox 10"/>
+          <p:cNvSpPr txBox="1"/>
+          <p:nvPr/>
+        </p:nvSpPr>
+        <p:spPr>
+          <a:xfrm>
+            <a:off x="5486400" y="3063240"/>
+            <a:ext cx="5486400" cy="822960"/>
+          </a:xfrm>
+          <a:prstGeom prst="rect">
+            <a:avLst/>
+          </a:prstGeom>
+          <a:noFill/>
+        </p:spPr>
+        <p:txBody>
+          <a:bodyPr wrap="square" anchor="t" lIns="0" rIns="0" tIns="0" bIns="0">
+            <a:spAutoFit/>
+          </a:bodyPr>
+          <a:lstStyle/>
+          <a:p>
+            <a:pPr algn="l"/>
+            <a:r>
+              <a:rPr sz="2000" b="0">
                 <a:solidFill>
                   <a:srgbClr val="555555"/>
                 </a:solidFill>
                 <a:latin typeface="Calibri"/>
               </a:rPr>
-              <a:t>La consistenza diventa una caratteristica distintiva: anche nel cambiamento, l’organizzazione mantiene coerenza tra valori, decisioni e comportamenti, generando fiducia, continuità e impatto interno ed esterno nel tempo.</a:t>
-            </a:r>
+              <a:t>2 - ROTTA</a:t>
+            </a:r>
+          </a:p>
+        </p:txBody>
+      </p:sp>
+      <p:sp>
+        <p:nvSpPr>
+          <p:cNvPr id="12" name="Rectangle 11"/>
+          <p:cNvSpPr/>
+          <p:nvPr/>
+        </p:nvSpPr>
+        <p:spPr>
+          <a:xfrm>
+            <a:off x="502920" y="3840480"/>
+            <a:ext cx="11201400" cy="9525"/>
+          </a:xfrm>
+          <a:prstGeom prst="rect">
+            <a:avLst/>
+          </a:prstGeom>
+          <a:solidFill>
+            <a:srgbClr val="CCCCCC"/>
+          </a:solidFill>
+          <a:ln>
+            <a:noFill/>
+          </a:ln>
+        </p:spPr>
+        <p:style>
+          <a:lnRef idx="1">
+            <a:schemeClr val="accent1"/>
+          </a:lnRef>
+          <a:fillRef idx="3">
+            <a:schemeClr val="accent1"/>
+          </a:fillRef>
+          <a:effectRef idx="2">
+            <a:schemeClr val="accent1"/>
+          </a:effectRef>
+          <a:fontRef idx="minor">
+            <a:schemeClr val="lt1"/>
+          </a:fontRef>
+        </p:style>
+        <p:txBody>
+          <a:bodyPr rtlCol="0" anchor="ctr"/>
+          <a:lstStyle/>
+          <a:p>
+            <a:pPr algn="ctr"/>
+          </a:p>
+        </p:txBody>
+      </p:sp>
+      <p:sp>
+        <p:nvSpPr>
+          <p:cNvPr id="13" name="TextBox 12"/>
+          <p:cNvSpPr txBox="1"/>
+          <p:nvPr/>
+        </p:nvSpPr>
+        <p:spPr>
+          <a:xfrm>
+            <a:off x="502920" y="3886200"/>
+            <a:ext cx="4937760" cy="822960"/>
+          </a:xfrm>
+          <a:prstGeom prst="rect">
+            <a:avLst/>
+          </a:prstGeom>
+          <a:noFill/>
+        </p:spPr>
+        <p:txBody>
+          <a:bodyPr wrap="square" anchor="t" lIns="0" rIns="0" tIns="0" bIns="0">
+            <a:spAutoFit/>
+          </a:bodyPr>
+          <a:lstStyle/>
+          <a:p>
+            <a:pPr algn="l"/>
+            <a:r>
+              <a:rPr sz="2000" b="1">
+                <a:solidFill>
+                  <a:srgbClr val="1A1A1A"/>
+                </a:solidFill>
+                <a:latin typeface="Calibri"/>
+              </a:rPr>
+              <a:t>PROCESSI</a:t>
+            </a:r>
+          </a:p>
+        </p:txBody>
+      </p:sp>
+      <p:sp>
+        <p:nvSpPr>
+          <p:cNvPr id="14" name="TextBox 13"/>
+          <p:cNvSpPr txBox="1"/>
+          <p:nvPr/>
+        </p:nvSpPr>
+        <p:spPr>
+          <a:xfrm>
+            <a:off x="5486400" y="3886200"/>
+            <a:ext cx="5486400" cy="822960"/>
+          </a:xfrm>
+          <a:prstGeom prst="rect">
+            <a:avLst/>
+          </a:prstGeom>
+          <a:noFill/>
+        </p:spPr>
+        <p:txBody>
+          <a:bodyPr wrap="square" anchor="t" lIns="0" rIns="0" tIns="0" bIns="0">
+            <a:spAutoFit/>
+          </a:bodyPr>
+          <a:lstStyle/>
+          <a:p>
+            <a:pPr algn="l"/>
+            <a:r>
+              <a:rPr sz="2000" b="0">
+                <a:solidFill>
+                  <a:srgbClr val="555555"/>
+                </a:solidFill>
+                <a:latin typeface="Calibri"/>
+              </a:rPr>
+              <a:t>2 - ROTTA</a:t>
+            </a:r>
+          </a:p>
+        </p:txBody>
+      </p:sp>
+      <p:sp>
+        <p:nvSpPr>
+          <p:cNvPr id="15" name="Rectangle 14"/>
+          <p:cNvSpPr/>
+          <p:nvPr/>
+        </p:nvSpPr>
+        <p:spPr>
+          <a:xfrm>
+            <a:off x="502920" y="4663440"/>
+            <a:ext cx="11201400" cy="9525"/>
+          </a:xfrm>
+          <a:prstGeom prst="rect">
+            <a:avLst/>
+          </a:prstGeom>
+          <a:solidFill>
+            <a:srgbClr val="CCCCCC"/>
+          </a:solidFill>
+          <a:ln>
+            <a:noFill/>
+          </a:ln>
+        </p:spPr>
+        <p:style>
+          <a:lnRef idx="1">
+            <a:schemeClr val="accent1"/>
+          </a:lnRef>
+          <a:fillRef idx="3">
+            <a:schemeClr val="accent1"/>
+          </a:fillRef>
+          <a:effectRef idx="2">
+            <a:schemeClr val="accent1"/>
+          </a:effectRef>
+          <a:fontRef idx="minor">
+            <a:schemeClr val="lt1"/>
+          </a:fontRef>
+        </p:style>
+        <p:txBody>
+          <a:bodyPr rtlCol="0" anchor="ctr"/>
+          <a:lstStyle/>
+          <a:p>
+            <a:pPr algn="ctr"/>
+          </a:p>
+        </p:txBody>
+      </p:sp>
+      <p:sp>
+        <p:nvSpPr>
+          <p:cNvPr id="16" name="TextBox 15"/>
+          <p:cNvSpPr txBox="1"/>
+          <p:nvPr/>
+        </p:nvSpPr>
+        <p:spPr>
+          <a:xfrm>
+            <a:off x="502920" y="4709160"/>
+            <a:ext cx="4937760" cy="822960"/>
+          </a:xfrm>
+          <a:prstGeom prst="rect">
+            <a:avLst/>
+          </a:prstGeom>
+          <a:noFill/>
+        </p:spPr>
+        <p:txBody>
+          <a:bodyPr wrap="square" anchor="t" lIns="0" rIns="0" tIns="0" bIns="0">
+            <a:spAutoFit/>
+          </a:bodyPr>
+          <a:lstStyle/>
+          <a:p>
+            <a:pPr algn="l"/>
+            <a:r>
+              <a:rPr sz="2000" b="1">
+                <a:solidFill>
+                  <a:srgbClr val="1A1A1A"/>
+                </a:solidFill>
+                <a:latin typeface="Calibri"/>
+              </a:rPr>
+              <a:t>MERCATO</a:t>
+            </a:r>
+          </a:p>
+        </p:txBody>
+      </p:sp>
+      <p:sp>
+        <p:nvSpPr>
+          <p:cNvPr id="17" name="TextBox 16"/>
+          <p:cNvSpPr txBox="1"/>
+          <p:nvPr/>
+        </p:nvSpPr>
+        <p:spPr>
+          <a:xfrm>
+            <a:off x="5486400" y="4709160"/>
+            <a:ext cx="5486400" cy="822960"/>
+          </a:xfrm>
+          <a:prstGeom prst="rect">
+            <a:avLst/>
+          </a:prstGeom>
+          <a:noFill/>
+        </p:spPr>
+        <p:txBody>
+          <a:bodyPr wrap="square" anchor="t" lIns="0" rIns="0" tIns="0" bIns="0">
+            <a:spAutoFit/>
+          </a:bodyPr>
+          <a:lstStyle/>
+          <a:p>
+            <a:pPr algn="l"/>
+            <a:r>
+              <a:rPr sz="2000" b="0">
+                <a:solidFill>
+                  <a:srgbClr val="555555"/>
+                </a:solidFill>
+                <a:latin typeface="Calibri"/>
+              </a:rPr>
+              <a:t>2 - ROTTA</a:t>
+            </a:r>
+          </a:p>
+        </p:txBody>
+      </p:sp>
+      <p:sp>
+        <p:nvSpPr>
+          <p:cNvPr id="18" name="Rectangle 17"/>
+          <p:cNvSpPr/>
+          <p:nvPr/>
+        </p:nvSpPr>
+        <p:spPr>
+          <a:xfrm>
+            <a:off x="502920" y="5486400"/>
+            <a:ext cx="11201400" cy="9525"/>
+          </a:xfrm>
+          <a:prstGeom prst="rect">
+            <a:avLst/>
+          </a:prstGeom>
+          <a:solidFill>
+            <a:srgbClr val="CCCCCC"/>
+          </a:solidFill>
+          <a:ln>
+            <a:noFill/>
+          </a:ln>
+        </p:spPr>
+        <p:style>
+          <a:lnRef idx="1">
+            <a:schemeClr val="accent1"/>
+          </a:lnRef>
+          <a:fillRef idx="3">
+            <a:schemeClr val="accent1"/>
+          </a:fillRef>
+          <a:effectRef idx="2">
+            <a:schemeClr val="accent1"/>
+          </a:effectRef>
+          <a:fontRef idx="minor">
+            <a:schemeClr val="lt1"/>
+          </a:fontRef>
+        </p:style>
+        <p:txBody>
+          <a:bodyPr rtlCol="0" anchor="ctr"/>
+          <a:lstStyle/>
+          <a:p>
+            <a:pPr algn="ctr"/>
           </a:p>
         </p:txBody>
       </p:sp>
@@ -3628,7 +3940,7 @@
                 </a:solidFill>
                 <a:latin typeface="Calibri"/>
               </a:rPr>
-              <a:t>4 - GRAVITA'</a:t>
+              <a:t>2 - ROTTA</a:t>
             </a:r>
           </a:p>
         </p:txBody>
@@ -3698,7 +4010,7 @@
                 </a:solidFill>
                 <a:latin typeface="Calibri"/>
               </a:rPr>
-              <a:t>La consistenza strategica rappresenta una capacità distintiva dell’organizzazione. Visione, cultura, processi e relazioni con gli stakeholder operano come un sistema integrato capace di mantenere coerenza anche nei contesti di cambiamento e complessità. La leadership genera orientamento condiviso, fiducia e responsabilità diffusa, mentre sostenibilità, apprendimento continuo e impatto umano positivo diventano parte integrante del modello di sviluppo e del vantaggio competitivo dell’organizzazione.</a:t>
+              <a:t>L’organizzazione inizia a definire una direzione più chiara rispetto ai temi DEIA, introducendo obiettivi, responsabilità e strumenti di pianificazione più strutturati. La leadership riconosce il valore strategico della cultura organizzativa, dell’inclusione e della sostenibilità delle pratiche interne, favorendo un primo allineamento tra visione e azione. Restano tuttavia differenze significative tra funzioni e livelli organizzativi, e la capacità di tradurre gli obiettivi in comportamenti coerenti è ancora in evoluzione.</a:t>
             </a:r>
           </a:p>
         </p:txBody>
@@ -3873,7 +4185,7 @@
                 </a:solidFill>
                 <a:latin typeface="Calibri"/>
               </a:rPr>
-              <a:t>4 - GRAVITA'</a:t>
+              <a:t>2 - ROTTA</a:t>
             </a:r>
           </a:p>
         </p:txBody>
@@ -3908,7 +4220,7 @@
                 </a:solidFill>
                 <a:latin typeface="Calibri"/>
               </a:rPr>
-              <a:t>Mantenere coerenza strategica anche nelle fasi di cambiamento, continuando a integrare sostenibilità, innovazione e impatto nelle decisioni aziendali. Rafforzare la capacità dell’organizzazione di anticipare evoluzioni future e generare valore nel lungo periodo.</a:t>
+              <a:t>Integrare gli obiettivi DEIA nei processi di pianificazione aziendale e nei momenti decisionali più rilevanti. Rafforzare coordinamento, allocazione di risorse e monitoraggio delle iniziative per aumentare continuità e coerenza.</a:t>
             </a:r>
           </a:p>
         </p:txBody>
@@ -4021,7 +4333,7 @@
                 </a:solidFill>
                 <a:latin typeface="Calibri"/>
               </a:rPr>
-              <a:t>4 - GRAVITA'</a:t>
+              <a:t>2 - ROTTA</a:t>
             </a:r>
           </a:p>
         </p:txBody>
@@ -4056,7 +4368,7 @@
                 </a:solidFill>
                 <a:latin typeface="Calibri"/>
               </a:rPr>
-              <a:t>Continuare a sviluppare una leadership capace di generare fiducia, orientamento e apprendimento continuo. Rafforzare la capacità della governance di sostenere innovazione, sostenibilità e coerenza sistemica nel tempo.</a:t>
+              <a:t>Rafforzare l'impegno della leadership attraverso obiettivi condivisi, responsabilizzazione e maggiore coordinamento tra funzioni e livelli organizzativi. Favorire una leadership più consapevole e coerente nei comportamenti quotidiani.</a:t>
             </a:r>
           </a:p>
         </p:txBody>
@@ -4169,7 +4481,7 @@
                 </a:solidFill>
                 <a:latin typeface="Calibri"/>
               </a:rPr>
-              <a:t>4 - GRAVITA'</a:t>
+              <a:t>3 - ORBITA</a:t>
             </a:r>
           </a:p>
         </p:txBody>
@@ -4204,7 +4516,7 @@
                 </a:solidFill>
                 <a:latin typeface="Calibri"/>
               </a:rPr>
-              <a:t>Consolidare una cultura della valutazione e dell’apprendimento continuo, rafforzando accountability, trasparenza e capacità di generare impatto sostenibile nel lungo periodo.</a:t>
+              <a:t>Integrare la misurazione dell’impatto nei processi di miglioramento continuo, utilizzando dati e feedback per orientare investimenti, priorità e sviluppo organizzativo.</a:t>
             </a:r>
           </a:p>
         </p:txBody>
@@ -4413,7 +4725,7 @@
                 </a:solidFill>
                 <a:latin typeface="Calibri"/>
               </a:rPr>
-              <a:t>4 - GRAVITA'</a:t>
+              <a:t>2 - ROTTA</a:t>
             </a:r>
           </a:p>
         </p:txBody>
@@ -4483,7 +4795,7 @@
                 </a:solidFill>
                 <a:latin typeface="Calibri"/>
               </a:rPr>
-              <a:t>La cultura rappresenta una forza generativa che orienta comportamenti, decisioni e relazioni anche nei momenti di complessità. Fiducia, responsabilità condivisa, inclusione e apprendimento continuo sono profondamente integrati nell’esperienza organizzativa. Le persone percepiscono coerenza tra ciò che l’organizzazione dichiara e ciò che realmente vive. L’ambiente favorisce autonomia, partecipazione e sviluppo reciproco, generando senso di appartenenza  e capacità di innovazione sostenibile.</a:t>
+              <a:t>L’organizzazione inizia a rendere più espliciti valori, comportamenti attesi e principi culturali condivisi, sviluppando maggiore attenzione verso ascolto, benessere, sicurezza psicologica e qualità delle relazioni interne. Emergono percorsi di sensibilizzazione, pratiche collaborative e iniziative orientate a rafforzare inclusione e partecipazione. L’esperienza culturale risulta tuttavia ancora disomogenea tra diverse aree dell’organizzazione.</a:t>
             </a:r>
           </a:p>
         </p:txBody>
@@ -4658,7 +4970,7 @@
                 </a:solidFill>
                 <a:latin typeface="Calibri"/>
               </a:rPr>
-              <a:t>4 - GRAVITA'</a:t>
+              <a:t>2 - ROTTA</a:t>
             </a:r>
           </a:p>
         </p:txBody>
@@ -4693,7 +5005,7 @@
                 </a:solidFill>
                 <a:latin typeface="Calibri"/>
               </a:rPr>
-              <a:t>Consolidare una cultura relazionale fondata su fiducia, responsabilità condivisa e collaborazione diffusa, sostenendo nel tempo capacità di innovazione, appartenenza e adattamento organizzativo.</a:t>
+              <a:t>Rafforzare pratiche manageriali coerenti con i valori dichiarati, promuovendo feedback costruttivi, collaborazione trasversale e maggiore attenzione alla qualità delle relazioni quotidiane.</a:t>
             </a:r>
           </a:p>
         </p:txBody>
@@ -4806,7 +5118,7 @@
                 </a:solidFill>
                 <a:latin typeface="Calibri"/>
               </a:rPr>
-              <a:t>4 - GRAVITA'</a:t>
+              <a:t>3 - ORBITA</a:t>
             </a:r>
           </a:p>
         </p:txBody>
@@ -4841,7 +5153,7 @@
                 </a:solidFill>
                 <a:latin typeface="Calibri"/>
               </a:rPr>
-              <a:t>Consolidare un ambiente di lavoro capace di sostenere benessere, equilibrio e possibilità di espressione nel lungo periodo, favorendo apprendimento continuo, fiducia reciproca e sostenibilità organizzativa.</a:t>
+              <a:t>Rafforzare spazi di dialogo, feedback e partecipazione che permettano alle persone di esprimersi con maggiore fiducia e contribuire attivamente al miglioramento organizzativo.</a:t>
             </a:r>
           </a:p>
         </p:txBody>
@@ -4954,7 +5266,7 @@
                 </a:solidFill>
                 <a:latin typeface="Calibri"/>
               </a:rPr>
-              <a:t>4 - GRAVITA'</a:t>
+              <a:t>2 - ROTTA</a:t>
             </a:r>
           </a:p>
         </p:txBody>
@@ -4989,7 +5301,7 @@
                 </a:solidFill>
                 <a:latin typeface="Calibri"/>
               </a:rPr>
-              <a:t>Consolidare una cultura dell’apprendimento diffuso in cui sviluppo delle competenze, consapevolezza relazionale e capacità di leggere le connessioni tra persone, processi e decisioni sostengano innovazione, adattabilità ed evoluzione organizzativa nel tempo.</a:t>
+              <a:t>Strutturare percorsi formativi continuativi per leadership e popolazione aziendale, collegando apprendimento, comportamenti organizzativi e qualità delle relazioni.</a:t>
             </a:r>
           </a:p>
         </p:txBody>
@@ -5198,7 +5510,7 @@
                 </a:solidFill>
                 <a:latin typeface="Calibri"/>
               </a:rPr>
-              <a:t>4 - GRAVITA'</a:t>
+              <a:t>2 - ROTTA</a:t>
             </a:r>
           </a:p>
         </p:txBody>
@@ -5268,7 +5580,8 @@
                 </a:solidFill>
                 <a:latin typeface="Calibri"/>
               </a:rPr>
-              <a:t>I processi rappresentano una vera infrastruttura abilitante della cultura organizzativa e dell’innovazione. Accessibilità, semplicità, autonomia e collaborazione guidano il modo in cui il lavoro viene progettato e gestito, favorendo sostenibilità, apprendimento continuo e qualità delle relazioni. La capacità di mantenere coerenza tra struttura e adattabilità permette all’organizzazione di evolvere con maggiore efficacia, rafforzando velocità decisionale, fiducia, crescita interna e capacità di generare valore condiviso.</a:t>
+              <a:t>L'organizzazione inizia a formalizzare pratiche e responsabilità comuni: emergono processi più strutturati per la gestione delle persone, lo sviluppo di prodotti e servizi, la collaborazione e il monitoraggio delle iniziative.
+Vengono introdotti strumenti di ascolto, momenti di feedback e pratiche orientate a favorire maggiore equità e trasparenza. Tuttavia, l’applicazione dei processi non è ancora uniforme e molte dinamiche dipendono ancora dalla qualità relazionale dei singoli leader o team.</a:t>
             </a:r>
           </a:p>
         </p:txBody>
@@ -5443,7 +5756,7 @@
                 </a:solidFill>
                 <a:latin typeface="Calibri"/>
               </a:rPr>
-              <a:t>4 - GRAVITA'</a:t>
+              <a:t>2 - ROTTA</a:t>
             </a:r>
           </a:p>
         </p:txBody>
@@ -5478,7 +5791,7 @@
                 </a:solidFill>
                 <a:latin typeface="Calibri"/>
               </a:rPr>
-              <a:t>Consolidare processi flessibili e adattabili capaci di sostenere autonomia, collaborazione e sostenibilità del lavoro nel tempo. Rafforzare la capacità dell’organizzazione di evolvere mantenendo continuità e qualità operativa.</a:t>
+              <a:t>Standardizzare strumenti, procedure e modalità operative, aumentando accessibilità delle informazioni e trasparenza dei flussi di lavoro. Coinvolgere le persone nella raccolta di feedback sull’esperienza operativa quotidiana.</a:t>
             </a:r>
           </a:p>
         </p:txBody>
@@ -5591,7 +5904,7 @@
                 </a:solidFill>
                 <a:latin typeface="Calibri"/>
               </a:rPr>
-              <a:t>4 - GRAVITA'</a:t>
+              <a:t>2 - ROTTA</a:t>
             </a:r>
           </a:p>
         </p:txBody>
@@ -5626,7 +5939,7 @@
                 </a:solidFill>
                 <a:latin typeface="Calibri"/>
               </a:rPr>
-              <a:t>Consolidare pratiche che supportino sviluppo, benessere e valorizzazione delle differenze nel lungo periodo, creando condizioni che favoriscano fiducia, appartenenza e continuità organizzativa.</a:t>
+              <a:t>Rafforzare processi di ascolto, performance review e sviluppo delle competenze, favorendo maggiore equità nelle opportunità e qualità della relazione manageriale.</a:t>
             </a:r>
           </a:p>
         </p:txBody>
@@ -5739,7 +6052,7 @@
                 </a:solidFill>
                 <a:latin typeface="Calibri"/>
               </a:rPr>
-              <a:t>4 - GRAVITA'</a:t>
+              <a:t>2 - ROTTA</a:t>
             </a:r>
           </a:p>
         </p:txBody>
@@ -5774,7 +6087,7 @@
                 </a:solidFill>
                 <a:latin typeface="Calibri"/>
               </a:rPr>
-              <a:t>Consolidare un ecosistema di innovazione aperto e partecipativo capace di generare apprendimento continuo, valore condiviso e impatto positivo per persone, organizzazione e mercato.</a:t>
+              <a:t>Integrare prospettive differenti nei processi di progettazione e sviluppo, aumentando collaborazione trasversale e attenzione ai bisogni di clienti, utenti e stakeholder.</a:t>
             </a:r>
           </a:p>
         </p:txBody>
@@ -5983,7 +6296,7 @@
                 </a:solidFill>
                 <a:latin typeface="Calibri"/>
               </a:rPr>
-              <a:t>4 - GRAVITA'</a:t>
+              <a:t>2 - ROTTA</a:t>
             </a:r>
           </a:p>
         </p:txBody>
@@ -6053,7 +6366,7 @@
                 </a:solidFill>
                 <a:latin typeface="Calibri"/>
               </a:rPr>
-              <a:t>L’organizzazione esercita un impatto positivo e riconoscibile sul proprio ecosistema, mantenendo forte coerenza tra identità interna, pratiche operative e presenza sul mercato. Reputazione, fiducia e sostenibilità diventano elementi distintivi della relazione con stakeholder, clienti e partner. Attraverso la propria capacità di innovare e generare valore condiviso, l’organizzazione contribuisce attivamente all’evoluzione culturale, sociale ed economica del contesto in cui opera.</a:t>
+              <a:t>L’organizzazione inizia a integrare temi di impatto, sostenibilità e cultura nelle relazioni con il mercato: emergono maggiore attenzione alla reputazione, alla qualità delle partnership, all'accessibilità e alla coerenza tra identità interna ed esterna. Vengono avviate iniziative di employer branding, ascolto degli stakeholder e comunicazione più consapevole, anche se la percezione esterna non è ancora completamente allineata alle pratiche organizzative interne.</a:t>
             </a:r>
           </a:p>
         </p:txBody>
@@ -6228,7 +6541,7 @@
                 </a:solidFill>
                 <a:latin typeface="Calibri"/>
               </a:rPr>
-              <a:t>4 - GRAVITA'</a:t>
+              <a:t>2 - ROTTA</a:t>
             </a:r>
           </a:p>
         </p:txBody>
@@ -6263,7 +6576,7 @@
                 </a:solidFill>
                 <a:latin typeface="Calibri"/>
               </a:rPr>
-              <a:t>Consolidare una comunicazione autentica e coerente con la cultura organizzativa, rafforzando reputazione, fiducia e capacità dell’organizzazione di generare impatto positivo e riconoscibile nel proprio ecosistema.</a:t>
+              <a:t>Definire linee guida condivise per comunicazione, attrattività aziendale e rappresentazione inclusiva, coinvolgendo funzioni aziendali diverse nella revisione dei contenuti e dei canali utilizzati.</a:t>
             </a:r>
           </a:p>
         </p:txBody>
@@ -6376,7 +6689,7 @@
                 </a:solidFill>
                 <a:latin typeface="Calibri"/>
               </a:rPr>
-              <a:t>4 - GRAVITA'</a:t>
+              <a:t>2 - ROTTA</a:t>
             </a:r>
           </a:p>
         </p:txBody>
@@ -6411,7 +6724,7 @@
                 </a:solidFill>
                 <a:latin typeface="Calibri"/>
               </a:rPr>
-              <a:t>Consolidare un approccio progettuale orientato ad accessibilità, semplicità e inclusione, rafforzando qualità dell’esperienza, fiducia degli utenti e capacità di generare valore condiviso nel lungo periodo.</a:t>
+              <a:t>Introdurre criteri di accessibilità e inclusione nella progettazione di servizi, prodotti ed esperienze, raccogliendo feedback più strutturati da clienti e stakeholder.</a:t>
             </a:r>
           </a:p>
         </p:txBody>
@@ -6524,7 +6837,7 @@
                 </a:solidFill>
                 <a:latin typeface="Calibri"/>
               </a:rPr>
-              <a:t>4 - GRAVITA'</a:t>
+              <a:t>3 - ORBITA</a:t>
             </a:r>
           </a:p>
         </p:txBody>
@@ -6559,7 +6872,7 @@
                 </a:solidFill>
                 <a:latin typeface="Calibri"/>
               </a:rPr>
-              <a:t>Consolidare un posizionamento riconoscibile e credibile sul piano sociale e culturale, contribuendo attivamente alla diffusione di pratiche sostenibili, inclusive e orientate al valore condiviso.</a:t>
+              <a:t>Integrare il contributo sociale e relazionale dell’organizzazione nelle attività di business, sviluppando collaborazioni continuative con stakeholder, comunità ed ecosistemi territoriali.</a:t>
             </a:r>
           </a:p>
         </p:txBody>
@@ -6803,7 +7116,7 @@
                 </a:solidFill>
                 <a:latin typeface="Calibri"/>
               </a:rPr>
-              <a:t>STRATEGIA   4 - GRAVITA'</a:t>
+              <a:t>STRATEGIA   2 - ROTTA</a:t>
             </a:r>
             <a:r>
               <a:rPr sz="1300" b="0">
@@ -6847,7 +7160,7 @@
                 </a:solidFill>
                 <a:latin typeface="Calibri"/>
               </a:rPr>
-              <a:t>CULTURA   4 - GRAVITA'</a:t>
+              <a:t>CULTURA   2 - ROTTA</a:t>
             </a:r>
             <a:r>
               <a:rPr sz="1300" b="0">
@@ -6891,7 +7204,7 @@
                 </a:solidFill>
                 <a:latin typeface="Calibri"/>
               </a:rPr>
-              <a:t>PROCESSI   4 - GRAVITA'</a:t>
+              <a:t>PROCESSI   2 - ROTTA</a:t>
             </a:r>
             <a:r>
               <a:rPr sz="1300" b="0">
@@ -6935,7 +7248,7 @@
                 </a:solidFill>
                 <a:latin typeface="Calibri"/>
               </a:rPr>
-              <a:t>MERCATO   4 - GRAVITA'</a:t>
+              <a:t>MERCATO   2 - ROTTA</a:t>
             </a:r>
             <a:r>
               <a:rPr sz="1300" b="0">
@@ -7057,7 +7370,7 @@
                 </a:solidFill>
                 <a:latin typeface="Calibri"/>
               </a:rPr>
-              <a:t>4 - GRAVITA'</a:t>
+              <a:t>2 - ROTTA</a:t>
             </a:r>
           </a:p>
         </p:txBody>
